--- a/RA2 - Emmagatzematge i copies de seguretat/AA3 - Copies de seguretat/RA2_AA3_Copies_de_seguretat.pptx
+++ b/RA2 - Emmagatzematge i copies de seguretat/AA3 - Copies de seguretat/RA2_AA3_Copies_de_seguretat.pptx
@@ -13,17 +13,22 @@
     <p:sldId id="261" r:id="rId7"/>
     <p:sldId id="262" r:id="rId8"/>
     <p:sldId id="263" r:id="rId9"/>
+    <p:sldId id="279" r:id="rId30"/>
     <p:sldId id="264" r:id="rId10"/>
     <p:sldId id="265" r:id="rId11"/>
     <p:sldId id="266" r:id="rId12"/>
+    <p:sldId id="280" r:id="rId31"/>
     <p:sldId id="267" r:id="rId13"/>
     <p:sldId id="268" r:id="rId14"/>
+    <p:sldId id="281" r:id="rId32"/>
     <p:sldId id="269" r:id="rId15"/>
+    <p:sldId id="282" r:id="rId33"/>
     <p:sldId id="270" r:id="rId16"/>
     <p:sldId id="271" r:id="rId17"/>
     <p:sldId id="272" r:id="rId18"/>
     <p:sldId id="273" r:id="rId19"/>
     <p:sldId id="274" r:id="rId20"/>
+    <p:sldId id="283" r:id="rId34"/>
     <p:sldId id="275" r:id="rId21"/>
     <p:sldId id="276" r:id="rId22"/>
     <p:sldId id="277" r:id="rId23"/>
@@ -2852,6 +2857,10 @@
           </a:solidFill>
           <a:ln/>
         </p:spPr>
+        <p:txBody>
+          <a:bodyPr/>
+          <a:p/>
+        </p:txBody>
       </p:sp>
       <p:sp>
         <p:nvSpPr>
@@ -2872,6 +2881,10 @@
           </a:solidFill>
           <a:ln/>
         </p:spPr>
+        <p:txBody>
+          <a:bodyPr/>
+          <a:p/>
+        </p:txBody>
       </p:sp>
       <p:sp>
         <p:nvSpPr>
@@ -3258,7 +3271,7 @@
                 <a:ea typeface="Calibri" pitchFamily="34" charset="-122"/>
                 <a:cs typeface="Calibri" pitchFamily="34" charset="-120"/>
               </a:rPr>
-              <a:t>9</a:t>
+              <a:t>11</a:t>
             </a:r>
             <a:endParaRPr lang="en-US" sz="1100" dirty="0"/>
           </a:p>
@@ -3501,7 +3514,7 @@
                 <a:ea typeface="Calibri" pitchFamily="34" charset="-122"/>
                 <a:cs typeface="Calibri" pitchFamily="34" charset="-120"/>
               </a:rPr>
-              <a:t>10</a:t>
+              <a:t>12</a:t>
             </a:r>
             <a:endParaRPr lang="en-US" sz="1100" dirty="0"/>
           </a:p>
@@ -4383,6 +4396,10 @@
           </a:solidFill>
           <a:ln/>
         </p:spPr>
+        <p:txBody>
+          <a:bodyPr/>
+          <a:p/>
+        </p:txBody>
       </p:sp>
       <p:pic>
         <p:nvPicPr>
@@ -4593,7 +4610,7 @@
                 <a:ea typeface="Calibri" pitchFamily="34" charset="-122"/>
                 <a:cs typeface="Calibri" pitchFamily="34" charset="-120"/>
               </a:rPr>
-              <a:t>11</a:t>
+              <a:t>14</a:t>
             </a:r>
             <a:endParaRPr lang="en-US" sz="1100" dirty="0"/>
           </a:p>
@@ -4632,6 +4649,10 @@
             </a:outerShdw>
           </a:effectLst>
         </p:spPr>
+        <p:txBody>
+          <a:bodyPr/>
+          <a:p/>
+        </p:txBody>
       </p:sp>
       <p:sp>
         <p:nvSpPr>
@@ -4652,6 +4673,10 @@
           </a:solidFill>
           <a:ln/>
         </p:spPr>
+        <p:txBody>
+          <a:bodyPr/>
+          <a:p/>
+        </p:txBody>
       </p:sp>
       <p:pic>
         <p:nvPicPr>
@@ -4791,6 +4816,10 @@
             </a:outerShdw>
           </a:effectLst>
         </p:spPr>
+        <p:txBody>
+          <a:bodyPr/>
+          <a:p/>
+        </p:txBody>
       </p:sp>
       <p:sp>
         <p:nvSpPr>
@@ -4811,6 +4840,10 @@
           </a:solidFill>
           <a:ln/>
         </p:spPr>
+        <p:txBody>
+          <a:bodyPr/>
+          <a:p/>
+        </p:txBody>
       </p:sp>
       <p:pic>
         <p:nvPicPr>
@@ -5060,7 +5093,7 @@
                 <a:ea typeface="Calibri" pitchFamily="34" charset="-122"/>
                 <a:cs typeface="Calibri" pitchFamily="34" charset="-120"/>
               </a:rPr>
-              <a:t>12</a:t>
+              <a:t>15</a:t>
             </a:r>
             <a:endParaRPr lang="en-US" sz="1100" dirty="0"/>
           </a:p>
@@ -5327,7 +5360,7 @@
                 <a:ea typeface="Calibri" pitchFamily="34" charset="-122"/>
                 <a:cs typeface="Calibri" pitchFamily="34" charset="-120"/>
               </a:rPr>
-              <a:t>13</a:t>
+              <a:t>17</a:t>
             </a:r>
             <a:endParaRPr lang="en-US" sz="1100" dirty="0"/>
           </a:p>
@@ -6461,6 +6494,10 @@
           </a:solidFill>
           <a:ln/>
         </p:spPr>
+        <p:txBody>
+          <a:bodyPr/>
+          <a:p/>
+        </p:txBody>
       </p:sp>
       <p:pic>
         <p:nvPicPr>
@@ -6671,7 +6708,7 @@
                 <a:ea typeface="Calibri" pitchFamily="34" charset="-122"/>
                 <a:cs typeface="Calibri" pitchFamily="34" charset="-120"/>
               </a:rPr>
-              <a:t>14</a:t>
+              <a:t>19</a:t>
             </a:r>
             <a:endParaRPr lang="en-US" sz="1100" dirty="0"/>
           </a:p>
@@ -6698,6 +6735,10 @@
           </a:solidFill>
           <a:ln/>
         </p:spPr>
+        <p:txBody>
+          <a:bodyPr/>
+          <a:p/>
+        </p:txBody>
       </p:sp>
       <p:pic>
         <p:nvPicPr>
@@ -7002,7 +7043,7 @@
                 <a:ea typeface="Calibri" pitchFamily="34" charset="-122"/>
                 <a:cs typeface="Calibri" pitchFamily="34" charset="-120"/>
               </a:rPr>
-              <a:t>15</a:t>
+              <a:t>20</a:t>
             </a:r>
             <a:endParaRPr lang="en-US" sz="1100" dirty="0"/>
           </a:p>
@@ -7099,6 +7140,10 @@
           </a:solidFill>
           <a:ln/>
         </p:spPr>
+        <p:txBody>
+          <a:bodyPr/>
+          <a:p/>
+        </p:txBody>
       </p:sp>
       <p:pic>
         <p:nvPicPr>
@@ -7309,7 +7354,7 @@
                 <a:ea typeface="Calibri" pitchFamily="34" charset="-122"/>
                 <a:cs typeface="Calibri" pitchFamily="34" charset="-120"/>
               </a:rPr>
-              <a:t>16</a:t>
+              <a:t>21</a:t>
             </a:r>
             <a:endParaRPr lang="en-US" sz="1100" dirty="0"/>
           </a:p>
@@ -7348,6 +7393,10 @@
             </a:outerShdw>
           </a:effectLst>
         </p:spPr>
+        <p:txBody>
+          <a:bodyPr/>
+          <a:p/>
+        </p:txBody>
       </p:sp>
       <p:sp>
         <p:nvSpPr>
@@ -7368,6 +7417,10 @@
           </a:solidFill>
           <a:ln/>
         </p:spPr>
+        <p:txBody>
+          <a:bodyPr/>
+          <a:p/>
+        </p:txBody>
       </p:sp>
       <p:pic>
         <p:nvPicPr>
@@ -7507,6 +7560,10 @@
             </a:outerShdw>
           </a:effectLst>
         </p:spPr>
+        <p:txBody>
+          <a:bodyPr/>
+          <a:p/>
+        </p:txBody>
       </p:sp>
       <p:sp>
         <p:nvSpPr>
@@ -7527,6 +7584,10 @@
           </a:solidFill>
           <a:ln/>
         </p:spPr>
+        <p:txBody>
+          <a:bodyPr/>
+          <a:p/>
+        </p:txBody>
       </p:sp>
       <p:pic>
         <p:nvPicPr>
@@ -7776,7 +7837,7 @@
                 <a:ea typeface="Calibri" pitchFamily="34" charset="-122"/>
                 <a:cs typeface="Calibri" pitchFamily="34" charset="-120"/>
               </a:rPr>
-              <a:t>17</a:t>
+              <a:t>22</a:t>
             </a:r>
             <a:endParaRPr lang="en-US" sz="1100" dirty="0"/>
           </a:p>
@@ -7873,6 +7934,10 @@
           </a:solidFill>
           <a:ln/>
         </p:spPr>
+        <p:txBody>
+          <a:bodyPr/>
+          <a:p/>
+        </p:txBody>
       </p:sp>
       <p:pic>
         <p:nvPicPr>
@@ -8083,7 +8148,7 @@
                 <a:ea typeface="Calibri" pitchFamily="34" charset="-122"/>
                 <a:cs typeface="Calibri" pitchFamily="34" charset="-120"/>
               </a:rPr>
-              <a:t>18</a:t>
+              <a:t>23</a:t>
             </a:r>
             <a:endParaRPr lang="en-US" sz="1100" dirty="0"/>
           </a:p>
@@ -8122,6 +8187,10 @@
             </a:outerShdw>
           </a:effectLst>
         </p:spPr>
+        <p:txBody>
+          <a:bodyPr/>
+          <a:p/>
+        </p:txBody>
       </p:sp>
       <p:sp>
         <p:nvSpPr>
@@ -8142,6 +8211,10 @@
           </a:solidFill>
           <a:ln/>
         </p:spPr>
+        <p:txBody>
+          <a:bodyPr/>
+          <a:p/>
+        </p:txBody>
       </p:sp>
       <p:pic>
         <p:nvPicPr>
@@ -8281,6 +8354,10 @@
             </a:outerShdw>
           </a:effectLst>
         </p:spPr>
+        <p:txBody>
+          <a:bodyPr/>
+          <a:p/>
+        </p:txBody>
       </p:sp>
       <p:sp>
         <p:nvSpPr>
@@ -8301,6 +8378,10 @@
           </a:solidFill>
           <a:ln/>
         </p:spPr>
+        <p:txBody>
+          <a:bodyPr/>
+          <a:p/>
+        </p:txBody>
       </p:sp>
       <p:pic>
         <p:nvPicPr>
@@ -8440,6 +8521,10 @@
             </a:outerShdw>
           </a:effectLst>
         </p:spPr>
+        <p:txBody>
+          <a:bodyPr/>
+          <a:p/>
+        </p:txBody>
       </p:sp>
       <p:sp>
         <p:nvSpPr>
@@ -8460,6 +8545,10 @@
           </a:solidFill>
           <a:ln/>
         </p:spPr>
+        <p:txBody>
+          <a:bodyPr/>
+          <a:p/>
+        </p:txBody>
       </p:sp>
       <p:pic>
         <p:nvPicPr>
@@ -8709,7 +8798,7 @@
                 <a:ea typeface="Calibri" pitchFamily="34" charset="-122"/>
                 <a:cs typeface="Calibri" pitchFamily="34" charset="-120"/>
               </a:rPr>
-              <a:t>1</a:t>
+              <a:t>2</a:t>
             </a:r>
             <a:endParaRPr lang="en-US" sz="1100" dirty="0"/>
           </a:p>
@@ -8748,6 +8837,10 @@
             </a:outerShdw>
           </a:effectLst>
         </p:spPr>
+        <p:txBody>
+          <a:bodyPr/>
+          <a:p/>
+        </p:txBody>
       </p:sp>
       <p:sp>
         <p:nvSpPr>
@@ -8768,6 +8861,10 @@
           </a:solidFill>
           <a:ln/>
         </p:spPr>
+        <p:txBody>
+          <a:bodyPr/>
+          <a:p/>
+        </p:txBody>
       </p:sp>
       <p:pic>
         <p:nvPicPr>
@@ -8907,6 +9004,10 @@
             </a:outerShdw>
           </a:effectLst>
         </p:spPr>
+        <p:txBody>
+          <a:bodyPr/>
+          <a:p/>
+        </p:txBody>
       </p:sp>
       <p:sp>
         <p:nvSpPr>
@@ -8927,6 +9028,10 @@
           </a:solidFill>
           <a:ln/>
         </p:spPr>
+        <p:txBody>
+          <a:bodyPr/>
+          <a:p/>
+        </p:txBody>
       </p:sp>
       <p:pic>
         <p:nvPicPr>
@@ -9066,6 +9171,10 @@
             </a:outerShdw>
           </a:effectLst>
         </p:spPr>
+        <p:txBody>
+          <a:bodyPr/>
+          <a:p/>
+        </p:txBody>
       </p:sp>
       <p:sp>
         <p:nvSpPr>
@@ -9086,6 +9195,10 @@
           </a:solidFill>
           <a:ln/>
         </p:spPr>
+        <p:txBody>
+          <a:bodyPr/>
+          <a:p/>
+        </p:txBody>
       </p:sp>
       <p:pic>
         <p:nvPicPr>
@@ -9335,7 +9448,7 @@
                 <a:ea typeface="Calibri" pitchFamily="34" charset="-122"/>
                 <a:cs typeface="Calibri" pitchFamily="34" charset="-120"/>
               </a:rPr>
-              <a:t>19</a:t>
+              <a:t>25</a:t>
             </a:r>
             <a:endParaRPr lang="en-US" sz="1100" dirty="0"/>
           </a:p>
@@ -10016,7 +10129,7 @@
                 <a:ea typeface="Calibri" pitchFamily="34" charset="-122"/>
                 <a:cs typeface="Calibri" pitchFamily="34" charset="-120"/>
               </a:rPr>
-              <a:t>20</a:t>
+              <a:t>26</a:t>
             </a:r>
             <a:endParaRPr lang="en-US" sz="1100" dirty="0"/>
           </a:p>
@@ -10747,7 +10860,7 @@
                 <a:ea typeface="Calibri" pitchFamily="34" charset="-122"/>
                 <a:cs typeface="Calibri" pitchFamily="34" charset="-120"/>
               </a:rPr>
-              <a:t>21</a:t>
+              <a:t>27</a:t>
             </a:r>
             <a:endParaRPr lang="en-US" sz="1100" dirty="0"/>
           </a:p>
@@ -11355,9 +11468,1013 @@
                 <a:ea typeface="Calibri" pitchFamily="34" charset="-122"/>
                 <a:cs typeface="Calibri" pitchFamily="34" charset="-120"/>
               </a:rPr>
-              <a:t>22</a:t>
+              <a:t>28</a:t>
             </a:r>
             <a:endParaRPr lang="en-US" sz="1100" dirty="0"/>
+          </a:p>
+        </p:txBody>
+      </p:sp>
+    </p:spTree>
+  </p:cSld>
+  <p:clrMapOvr>
+    <a:masterClrMapping/>
+  </p:clrMapOvr>
+</p:sld>
+</file>
+
+<file path=ppt/slides/slide24.xml><?xml version="1.0" encoding="utf-8"?>
+<p:sld xmlns:a="http://schemas.openxmlformats.org/drawingml/2006/main" xmlns:p="http://schemas.openxmlformats.org/presentationml/2006/main" xmlns:r="http://schemas.openxmlformats.org/officeDocument/2006/relationships">
+  <p:cSld>
+    <p:bg>
+      <p:bgPr>
+        <a:solidFill>
+          <a:srgbClr val="F4F7F9"/>
+        </a:solidFill>
+        <a:effectLst/>
+      </p:bgPr>
+    </p:bg>
+    <p:spTree>
+      <p:nvGrpSpPr>
+        <p:cNvPr id="1" name=""/>
+        <p:cNvGrpSpPr/>
+        <p:nvPr/>
+      </p:nvGrpSpPr>
+      <p:grpSpPr/>
+      <p:sp>
+        <p:nvSpPr>
+          <p:cNvPr id="2" name="TextBox 1"/>
+          <p:cNvSpPr txBox="1"/>
+          <p:nvPr/>
+        </p:nvSpPr>
+        <p:spPr>
+          <a:xfrm>
+            <a:off x="548640" y="411480"/>
+            <a:ext cx="10515600" cy="320040"/>
+          </a:xfrm>
+          <a:prstGeom prst="rect">
+            <a:avLst/>
+          </a:prstGeom>
+          <a:noFill/>
+        </p:spPr>
+        <p:txBody>
+          <a:bodyPr wrap="square">
+            <a:spAutoFit/>
+          </a:bodyPr>
+          <a:lstStyle/>
+          <a:p>
+            <a:pPr algn="l"/>
+            <a:r>
+              <a:rPr sz="1300" b="1" i="0">
+                <a:solidFill>
+                  <a:srgbClr val="F2A541"/>
+                </a:solidFill>
+                <a:latin typeface="Calibri"/>
+              </a:rPr>
+              <a:t>L'ESTÀNDARD DEL SECTOR</a:t>
+            </a:r>
+          </a:p>
+        </p:txBody>
+      </p:sp>
+      <p:sp>
+        <p:nvSpPr>
+          <p:cNvPr id="3" name="TextBox 2"/>
+          <p:cNvSpPr txBox="1"/>
+          <p:nvPr/>
+        </p:nvSpPr>
+        <p:spPr>
+          <a:xfrm>
+            <a:off x="548640" y="685800"/>
+            <a:ext cx="10972800" cy="822960"/>
+          </a:xfrm>
+          <a:prstGeom prst="rect">
+            <a:avLst/>
+          </a:prstGeom>
+          <a:noFill/>
+        </p:spPr>
+        <p:txBody>
+          <a:bodyPr wrap="square">
+            <a:spAutoFit/>
+          </a:bodyPr>
+          <a:lstStyle/>
+          <a:p>
+            <a:pPr algn="l"/>
+            <a:r>
+              <a:rPr sz="2800" b="1" i="0">
+                <a:solidFill>
+                  <a:srgbClr val="16242E"/>
+                </a:solidFill>
+                <a:latin typeface="Cambria"/>
+              </a:rPr>
+              <a:t>La regla 3-2-1</a:t>
+            </a:r>
+          </a:p>
+        </p:txBody>
+      </p:sp>
+      <p:pic>
+        <p:nvPicPr>
+          <p:cNvPr id="4" name="Picture 3" descr="3-2-1.png"/>
+          <p:cNvPicPr>
+            <a:picLocks noChangeAspect="1"/>
+          </p:cNvPicPr>
+          <p:nvPr/>
+        </p:nvPicPr>
+        <p:blipFill>
+          <a:blip r:embed="rId2"/>
+          <a:stretch>
+            <a:fillRect/>
+          </a:stretch>
+        </p:blipFill>
+        <p:spPr>
+          <a:xfrm>
+            <a:off x="2895447" y="1920240"/>
+            <a:ext cx="6400800" cy="3600450"/>
+          </a:xfrm>
+          <a:prstGeom prst="rect">
+            <a:avLst/>
+          </a:prstGeom>
+        </p:spPr>
+      </p:pic>
+      <p:sp>
+        <p:nvSpPr>
+          <p:cNvPr id="5" name="TextBox 4"/>
+          <p:cNvSpPr txBox="1"/>
+          <p:nvPr/>
+        </p:nvSpPr>
+        <p:spPr>
+          <a:xfrm>
+            <a:off x="548640" y="5657850"/>
+            <a:ext cx="11064240" cy="457200"/>
+          </a:xfrm>
+          <a:prstGeom prst="rect">
+            <a:avLst/>
+          </a:prstGeom>
+          <a:noFill/>
+        </p:spPr>
+        <p:txBody>
+          <a:bodyPr wrap="square">
+            <a:spAutoFit/>
+          </a:bodyPr>
+          <a:lstStyle/>
+          <a:p>
+            <a:pPr algn="ctr"/>
+            <a:r>
+              <a:rPr sz="1200" b="0" i="1">
+                <a:solidFill>
+                  <a:srgbClr val="5B6B77"/>
+                </a:solidFill>
+                <a:latin typeface="Calibri"/>
+              </a:rPr>
+              <a:t>La regla 3-2-1 és l'estàndard de referència per organitzar les còpies de seguretat.</a:t>
+            </a:r>
+          </a:p>
+        </p:txBody>
+      </p:sp>
+      <p:sp>
+        <p:nvSpPr>
+          <p:cNvPr id="6" name="TextBox 5"/>
+          <p:cNvSpPr txBox="1"/>
+          <p:nvPr/>
+        </p:nvSpPr>
+        <p:spPr>
+          <a:xfrm>
+            <a:off x="11548872" y="6446520"/>
+            <a:ext cx="365760" cy="274320"/>
+          </a:xfrm>
+          <a:prstGeom prst="rect">
+            <a:avLst/>
+          </a:prstGeom>
+          <a:noFill/>
+        </p:spPr>
+        <p:txBody>
+          <a:bodyPr wrap="none">
+            <a:spAutoFit/>
+          </a:bodyPr>
+          <a:lstStyle/>
+          <a:p>
+            <a:pPr algn="r"/>
+            <a:r>
+              <a:rPr sz="1000">
+                <a:solidFill>
+                  <a:srgbClr val="5B6B77"/>
+                </a:solidFill>
+              </a:rPr>
+              <a:t>9</a:t>
+            </a:r>
+          </a:p>
+        </p:txBody>
+      </p:sp>
+    </p:spTree>
+  </p:cSld>
+  <p:clrMapOvr>
+    <a:masterClrMapping/>
+  </p:clrMapOvr>
+</p:sld>
+</file>
+
+<file path=ppt/slides/slide25.xml><?xml version="1.0" encoding="utf-8"?>
+<p:sld xmlns:a="http://schemas.openxmlformats.org/drawingml/2006/main" xmlns:p="http://schemas.openxmlformats.org/presentationml/2006/main" xmlns:r="http://schemas.openxmlformats.org/officeDocument/2006/relationships">
+  <p:cSld>
+    <p:bg>
+      <p:bgPr>
+        <a:solidFill>
+          <a:srgbClr val="F4F7F9"/>
+        </a:solidFill>
+        <a:effectLst/>
+      </p:bgPr>
+    </p:bg>
+    <p:spTree>
+      <p:nvGrpSpPr>
+        <p:cNvPr id="1" name=""/>
+        <p:cNvGrpSpPr/>
+        <p:nvPr/>
+      </p:nvGrpSpPr>
+      <p:grpSpPr/>
+      <p:sp>
+        <p:nvSpPr>
+          <p:cNvPr id="2" name="TextBox 1"/>
+          <p:cNvSpPr txBox="1"/>
+          <p:nvPr/>
+        </p:nvSpPr>
+        <p:spPr>
+          <a:xfrm>
+            <a:off x="548640" y="411480"/>
+            <a:ext cx="10515600" cy="320040"/>
+          </a:xfrm>
+          <a:prstGeom prst="rect">
+            <a:avLst/>
+          </a:prstGeom>
+          <a:noFill/>
+        </p:spPr>
+        <p:txBody>
+          <a:bodyPr wrap="square">
+            <a:spAutoFit/>
+          </a:bodyPr>
+          <a:lstStyle/>
+          <a:p>
+            <a:pPr algn="l"/>
+            <a:r>
+              <a:rPr sz="1300" b="1" i="0">
+                <a:solidFill>
+                  <a:srgbClr val="F2A541"/>
+                </a:solidFill>
+                <a:latin typeface="Calibri"/>
+              </a:rPr>
+              <a:t>COM FER LES CÒPIES</a:t>
+            </a:r>
+          </a:p>
+        </p:txBody>
+      </p:sp>
+      <p:sp>
+        <p:nvSpPr>
+          <p:cNvPr id="3" name="TextBox 2"/>
+          <p:cNvSpPr txBox="1"/>
+          <p:nvPr/>
+        </p:nvSpPr>
+        <p:spPr>
+          <a:xfrm>
+            <a:off x="548640" y="685800"/>
+            <a:ext cx="10972800" cy="822960"/>
+          </a:xfrm>
+          <a:prstGeom prst="rect">
+            <a:avLst/>
+          </a:prstGeom>
+          <a:noFill/>
+        </p:spPr>
+        <p:txBody>
+          <a:bodyPr wrap="square">
+            <a:spAutoFit/>
+          </a:bodyPr>
+          <a:lstStyle/>
+          <a:p>
+            <a:pPr algn="l"/>
+            <a:r>
+              <a:rPr sz="2800" b="1" i="0">
+                <a:solidFill>
+                  <a:srgbClr val="16242E"/>
+                </a:solidFill>
+                <a:latin typeface="Cambria"/>
+              </a:rPr>
+              <a:t>Incremental vs. diferencial</a:t>
+            </a:r>
+          </a:p>
+        </p:txBody>
+      </p:sp>
+      <p:pic>
+        <p:nvPicPr>
+          <p:cNvPr id="4" name="Picture 3" descr="incremental.png"/>
+          <p:cNvPicPr>
+            <a:picLocks noChangeAspect="1"/>
+          </p:cNvPicPr>
+          <p:nvPr/>
+        </p:nvPicPr>
+        <p:blipFill>
+          <a:blip r:embed="rId2"/>
+          <a:stretch>
+            <a:fillRect/>
+          </a:stretch>
+        </p:blipFill>
+        <p:spPr>
+          <a:xfrm>
+            <a:off x="830503" y="1965960"/>
+            <a:ext cx="4754880" cy="3037839"/>
+          </a:xfrm>
+          <a:prstGeom prst="rect">
+            <a:avLst/>
+          </a:prstGeom>
+        </p:spPr>
+      </p:pic>
+      <p:sp>
+        <p:nvSpPr>
+          <p:cNvPr id="5" name="TextBox 4"/>
+          <p:cNvSpPr txBox="1"/>
+          <p:nvPr/>
+        </p:nvSpPr>
+        <p:spPr>
+          <a:xfrm>
+            <a:off x="548640" y="5140960"/>
+            <a:ext cx="5318607" cy="548640"/>
+          </a:xfrm>
+          <a:prstGeom prst="rect">
+            <a:avLst/>
+          </a:prstGeom>
+          <a:noFill/>
+        </p:spPr>
+        <p:txBody>
+          <a:bodyPr wrap="square">
+            <a:spAutoFit/>
+          </a:bodyPr>
+          <a:lstStyle/>
+          <a:p>
+            <a:pPr algn="ctr"/>
+            <a:r>
+              <a:rPr sz="1150" b="0" i="1">
+                <a:solidFill>
+                  <a:srgbClr val="5B6B77"/>
+                </a:solidFill>
+                <a:latin typeface="Calibri"/>
+              </a:rPr>
+              <a:t>Còpia incremental.</a:t>
+            </a:r>
+          </a:p>
+        </p:txBody>
+      </p:sp>
+      <p:pic>
+        <p:nvPicPr>
+          <p:cNvPr id="6" name="Picture 5" descr="diferencial.png"/>
+          <p:cNvPicPr>
+            <a:picLocks noChangeAspect="1"/>
+          </p:cNvPicPr>
+          <p:nvPr/>
+        </p:nvPicPr>
+        <p:blipFill>
+          <a:blip r:embed="rId3"/>
+          <a:stretch>
+            <a:fillRect/>
+          </a:stretch>
+        </p:blipFill>
+        <p:spPr>
+          <a:xfrm>
+            <a:off x="6606311" y="1965960"/>
+            <a:ext cx="4754880" cy="2998216"/>
+          </a:xfrm>
+          <a:prstGeom prst="rect">
+            <a:avLst/>
+          </a:prstGeom>
+        </p:spPr>
+      </p:pic>
+      <p:sp>
+        <p:nvSpPr>
+          <p:cNvPr id="7" name="TextBox 6"/>
+          <p:cNvSpPr txBox="1"/>
+          <p:nvPr/>
+        </p:nvSpPr>
+        <p:spPr>
+          <a:xfrm>
+            <a:off x="6324447" y="5101336"/>
+            <a:ext cx="5318607" cy="548640"/>
+          </a:xfrm>
+          <a:prstGeom prst="rect">
+            <a:avLst/>
+          </a:prstGeom>
+          <a:noFill/>
+        </p:spPr>
+        <p:txBody>
+          <a:bodyPr wrap="square">
+            <a:spAutoFit/>
+          </a:bodyPr>
+          <a:lstStyle/>
+          <a:p>
+            <a:pPr algn="ctr"/>
+            <a:r>
+              <a:rPr sz="1150" b="0" i="1">
+                <a:solidFill>
+                  <a:srgbClr val="5B6B77"/>
+                </a:solidFill>
+                <a:latin typeface="Calibri"/>
+              </a:rPr>
+              <a:t>Còpia diferencial.</a:t>
+            </a:r>
+          </a:p>
+        </p:txBody>
+      </p:sp>
+      <p:sp>
+        <p:nvSpPr>
+          <p:cNvPr id="8" name="TextBox 7"/>
+          <p:cNvSpPr txBox="1"/>
+          <p:nvPr/>
+        </p:nvSpPr>
+        <p:spPr>
+          <a:xfrm>
+            <a:off x="11548872" y="6446520"/>
+            <a:ext cx="365760" cy="274320"/>
+          </a:xfrm>
+          <a:prstGeom prst="rect">
+            <a:avLst/>
+          </a:prstGeom>
+          <a:noFill/>
+        </p:spPr>
+        <p:txBody>
+          <a:bodyPr wrap="none">
+            <a:spAutoFit/>
+          </a:bodyPr>
+          <a:lstStyle/>
+          <a:p>
+            <a:pPr algn="r"/>
+            <a:r>
+              <a:rPr sz="1000">
+                <a:solidFill>
+                  <a:srgbClr val="5B6B77"/>
+                </a:solidFill>
+              </a:rPr>
+              <a:t>13</a:t>
+            </a:r>
+          </a:p>
+        </p:txBody>
+      </p:sp>
+    </p:spTree>
+  </p:cSld>
+  <p:clrMapOvr>
+    <a:masterClrMapping/>
+  </p:clrMapOvr>
+</p:sld>
+</file>
+
+<file path=ppt/slides/slide26.xml><?xml version="1.0" encoding="utf-8"?>
+<p:sld xmlns:a="http://schemas.openxmlformats.org/drawingml/2006/main" xmlns:p="http://schemas.openxmlformats.org/presentationml/2006/main" xmlns:r="http://schemas.openxmlformats.org/officeDocument/2006/relationships">
+  <p:cSld>
+    <p:bg>
+      <p:bgPr>
+        <a:solidFill>
+          <a:srgbClr val="F4F7F9"/>
+        </a:solidFill>
+        <a:effectLst/>
+      </p:bgPr>
+    </p:bg>
+    <p:spTree>
+      <p:nvGrpSpPr>
+        <p:cNvPr id="1" name=""/>
+        <p:cNvGrpSpPr/>
+        <p:nvPr/>
+      </p:nvGrpSpPr>
+      <p:grpSpPr/>
+      <p:sp>
+        <p:nvSpPr>
+          <p:cNvPr id="2" name="TextBox 1"/>
+          <p:cNvSpPr txBox="1"/>
+          <p:nvPr/>
+        </p:nvSpPr>
+        <p:spPr>
+          <a:xfrm>
+            <a:off x="548640" y="411480"/>
+            <a:ext cx="10515600" cy="320040"/>
+          </a:xfrm>
+          <a:prstGeom prst="rect">
+            <a:avLst/>
+          </a:prstGeom>
+          <a:noFill/>
+        </p:spPr>
+        <p:txBody>
+          <a:bodyPr wrap="square">
+            <a:spAutoFit/>
+          </a:bodyPr>
+          <a:lstStyle/>
+          <a:p>
+            <a:pPr algn="l"/>
+            <a:r>
+              <a:rPr sz="1300" b="1" i="0">
+                <a:solidFill>
+                  <a:srgbClr val="F2A541"/>
+                </a:solidFill>
+                <a:latin typeface="Calibri"/>
+              </a:rPr>
+              <a:t>ESQUEMA DE ROTACIÓ</a:t>
+            </a:r>
+          </a:p>
+        </p:txBody>
+      </p:sp>
+      <p:sp>
+        <p:nvSpPr>
+          <p:cNvPr id="3" name="TextBox 2"/>
+          <p:cNvSpPr txBox="1"/>
+          <p:nvPr/>
+        </p:nvSpPr>
+        <p:spPr>
+          <a:xfrm>
+            <a:off x="548640" y="685800"/>
+            <a:ext cx="10972800" cy="822960"/>
+          </a:xfrm>
+          <a:prstGeom prst="rect">
+            <a:avLst/>
+          </a:prstGeom>
+          <a:noFill/>
+        </p:spPr>
+        <p:txBody>
+          <a:bodyPr wrap="square">
+            <a:spAutoFit/>
+          </a:bodyPr>
+          <a:lstStyle/>
+          <a:p>
+            <a:pPr algn="l"/>
+            <a:r>
+              <a:rPr sz="2800" b="1" i="0">
+                <a:solidFill>
+                  <a:srgbClr val="16242E"/>
+                </a:solidFill>
+                <a:latin typeface="Cambria"/>
+              </a:rPr>
+              <a:t>Grandfather-father-son (GFS)</a:t>
+            </a:r>
+          </a:p>
+        </p:txBody>
+      </p:sp>
+      <p:pic>
+        <p:nvPicPr>
+          <p:cNvPr id="4" name="Picture 3" descr="gfs.png"/>
+          <p:cNvPicPr>
+            <a:picLocks noChangeAspect="1"/>
+          </p:cNvPicPr>
+          <p:nvPr/>
+        </p:nvPicPr>
+        <p:blipFill>
+          <a:blip r:embed="rId2"/>
+          <a:stretch>
+            <a:fillRect/>
+          </a:stretch>
+        </p:blipFill>
+        <p:spPr>
+          <a:xfrm>
+            <a:off x="2715833" y="1920240"/>
+            <a:ext cx="6760028" cy="4206240"/>
+          </a:xfrm>
+          <a:prstGeom prst="rect">
+            <a:avLst/>
+          </a:prstGeom>
+        </p:spPr>
+      </p:pic>
+      <p:sp>
+        <p:nvSpPr>
+          <p:cNvPr id="5" name="TextBox 4"/>
+          <p:cNvSpPr txBox="1"/>
+          <p:nvPr/>
+        </p:nvSpPr>
+        <p:spPr>
+          <a:xfrm>
+            <a:off x="548640" y="6263640"/>
+            <a:ext cx="11064240" cy="457200"/>
+          </a:xfrm>
+          <a:prstGeom prst="rect">
+            <a:avLst/>
+          </a:prstGeom>
+          <a:noFill/>
+        </p:spPr>
+        <p:txBody>
+          <a:bodyPr wrap="square">
+            <a:spAutoFit/>
+          </a:bodyPr>
+          <a:lstStyle/>
+          <a:p>
+            <a:pPr algn="ctr"/>
+            <a:r>
+              <a:rPr sz="1200" b="0" i="1">
+                <a:solidFill>
+                  <a:srgbClr val="5B6B77"/>
+                </a:solidFill>
+                <a:latin typeface="Calibri"/>
+              </a:rPr>
+              <a:t>L'esquema GFS organitza les còpies en tres nivells: avi (mensual), pare (setmanal) i fill (diari).</a:t>
+            </a:r>
+          </a:p>
+        </p:txBody>
+      </p:sp>
+      <p:sp>
+        <p:nvSpPr>
+          <p:cNvPr id="6" name="TextBox 5"/>
+          <p:cNvSpPr txBox="1"/>
+          <p:nvPr/>
+        </p:nvSpPr>
+        <p:spPr>
+          <a:xfrm>
+            <a:off x="11548872" y="6446520"/>
+            <a:ext cx="365760" cy="274320"/>
+          </a:xfrm>
+          <a:prstGeom prst="rect">
+            <a:avLst/>
+          </a:prstGeom>
+          <a:noFill/>
+        </p:spPr>
+        <p:txBody>
+          <a:bodyPr wrap="none">
+            <a:spAutoFit/>
+          </a:bodyPr>
+          <a:lstStyle/>
+          <a:p>
+            <a:pPr algn="r"/>
+            <a:r>
+              <a:rPr sz="1000">
+                <a:solidFill>
+                  <a:srgbClr val="5B6B77"/>
+                </a:solidFill>
+              </a:rPr>
+              <a:t>16</a:t>
+            </a:r>
+          </a:p>
+        </p:txBody>
+      </p:sp>
+    </p:spTree>
+  </p:cSld>
+  <p:clrMapOvr>
+    <a:masterClrMapping/>
+  </p:clrMapOvr>
+</p:sld>
+</file>
+
+<file path=ppt/slides/slide27.xml><?xml version="1.0" encoding="utf-8"?>
+<p:sld xmlns:a="http://schemas.openxmlformats.org/drawingml/2006/main" xmlns:p="http://schemas.openxmlformats.org/presentationml/2006/main" xmlns:r="http://schemas.openxmlformats.org/officeDocument/2006/relationships">
+  <p:cSld>
+    <p:bg>
+      <p:bgPr>
+        <a:solidFill>
+          <a:srgbClr val="F4F7F9"/>
+        </a:solidFill>
+        <a:effectLst/>
+      </p:bgPr>
+    </p:bg>
+    <p:spTree>
+      <p:nvGrpSpPr>
+        <p:cNvPr id="1" name=""/>
+        <p:cNvGrpSpPr/>
+        <p:nvPr/>
+      </p:nvGrpSpPr>
+      <p:grpSpPr/>
+      <p:sp>
+        <p:nvSpPr>
+          <p:cNvPr id="2" name="TextBox 1"/>
+          <p:cNvSpPr txBox="1"/>
+          <p:nvPr/>
+        </p:nvSpPr>
+        <p:spPr>
+          <a:xfrm>
+            <a:off x="548640" y="411480"/>
+            <a:ext cx="10515600" cy="320040"/>
+          </a:xfrm>
+          <a:prstGeom prst="rect">
+            <a:avLst/>
+          </a:prstGeom>
+          <a:noFill/>
+        </p:spPr>
+        <p:txBody>
+          <a:bodyPr wrap="square">
+            <a:spAutoFit/>
+          </a:bodyPr>
+          <a:lstStyle/>
+          <a:p>
+            <a:pPr algn="l"/>
+            <a:r>
+              <a:rPr sz="1300" b="1" i="0">
+                <a:solidFill>
+                  <a:srgbClr val="F2A541"/>
+                </a:solidFill>
+                <a:latin typeface="Calibri"/>
+              </a:rPr>
+              <a:t>ESQUEMA DE ROTACIÓ</a:t>
+            </a:r>
+          </a:p>
+        </p:txBody>
+      </p:sp>
+      <p:sp>
+        <p:nvSpPr>
+          <p:cNvPr id="3" name="TextBox 2"/>
+          <p:cNvSpPr txBox="1"/>
+          <p:nvPr/>
+        </p:nvSpPr>
+        <p:spPr>
+          <a:xfrm>
+            <a:off x="548640" y="685800"/>
+            <a:ext cx="10972800" cy="822960"/>
+          </a:xfrm>
+          <a:prstGeom prst="rect">
+            <a:avLst/>
+          </a:prstGeom>
+          <a:noFill/>
+        </p:spPr>
+        <p:txBody>
+          <a:bodyPr wrap="square">
+            <a:spAutoFit/>
+          </a:bodyPr>
+          <a:lstStyle/>
+          <a:p>
+            <a:pPr algn="l"/>
+            <a:r>
+              <a:rPr sz="2800" b="1" i="0">
+                <a:solidFill>
+                  <a:srgbClr val="16242E"/>
+                </a:solidFill>
+                <a:latin typeface="Cambria"/>
+              </a:rPr>
+              <a:t>Torres de Hanoi</a:t>
+            </a:r>
+          </a:p>
+        </p:txBody>
+      </p:sp>
+      <p:pic>
+        <p:nvPicPr>
+          <p:cNvPr id="4" name="Picture 3" descr="hanoi.png"/>
+          <p:cNvPicPr>
+            <a:picLocks noChangeAspect="1"/>
+          </p:cNvPicPr>
+          <p:nvPr/>
+        </p:nvPicPr>
+        <p:blipFill>
+          <a:blip r:embed="rId2"/>
+          <a:stretch>
+            <a:fillRect/>
+          </a:stretch>
+        </p:blipFill>
+        <p:spPr>
+          <a:xfrm>
+            <a:off x="3124047" y="1920240"/>
+            <a:ext cx="5943600" cy="2352675"/>
+          </a:xfrm>
+          <a:prstGeom prst="rect">
+            <a:avLst/>
+          </a:prstGeom>
+        </p:spPr>
+      </p:pic>
+      <p:sp>
+        <p:nvSpPr>
+          <p:cNvPr id="5" name="TextBox 4"/>
+          <p:cNvSpPr txBox="1"/>
+          <p:nvPr/>
+        </p:nvSpPr>
+        <p:spPr>
+          <a:xfrm>
+            <a:off x="548640" y="4410075"/>
+            <a:ext cx="11064240" cy="457200"/>
+          </a:xfrm>
+          <a:prstGeom prst="rect">
+            <a:avLst/>
+          </a:prstGeom>
+          <a:noFill/>
+        </p:spPr>
+        <p:txBody>
+          <a:bodyPr wrap="square">
+            <a:spAutoFit/>
+          </a:bodyPr>
+          <a:lstStyle/>
+          <a:p>
+            <a:pPr algn="ctr"/>
+            <a:r>
+              <a:rPr sz="1200" b="0" i="1">
+                <a:solidFill>
+                  <a:srgbClr val="5B6B77"/>
+                </a:solidFill>
+                <a:latin typeface="Calibri"/>
+              </a:rPr>
+              <a:t>El període d'ús de cada suport es duplica a cada lletra (A, B, C, D...).</a:t>
+            </a:r>
+          </a:p>
+        </p:txBody>
+      </p:sp>
+      <p:sp>
+        <p:nvSpPr>
+          <p:cNvPr id="6" name="TextBox 5"/>
+          <p:cNvSpPr txBox="1"/>
+          <p:nvPr/>
+        </p:nvSpPr>
+        <p:spPr>
+          <a:xfrm>
+            <a:off x="11548872" y="6446520"/>
+            <a:ext cx="365760" cy="274320"/>
+          </a:xfrm>
+          <a:prstGeom prst="rect">
+            <a:avLst/>
+          </a:prstGeom>
+          <a:noFill/>
+        </p:spPr>
+        <p:txBody>
+          <a:bodyPr wrap="none">
+            <a:spAutoFit/>
+          </a:bodyPr>
+          <a:lstStyle/>
+          <a:p>
+            <a:pPr algn="r"/>
+            <a:r>
+              <a:rPr sz="1000">
+                <a:solidFill>
+                  <a:srgbClr val="5B6B77"/>
+                </a:solidFill>
+              </a:rPr>
+              <a:t>18</a:t>
+            </a:r>
+          </a:p>
+        </p:txBody>
+      </p:sp>
+    </p:spTree>
+  </p:cSld>
+  <p:clrMapOvr>
+    <a:masterClrMapping/>
+  </p:clrMapOvr>
+</p:sld>
+</file>
+
+<file path=ppt/slides/slide28.xml><?xml version="1.0" encoding="utf-8"?>
+<p:sld xmlns:a="http://schemas.openxmlformats.org/drawingml/2006/main" xmlns:p="http://schemas.openxmlformats.org/presentationml/2006/main" xmlns:r="http://schemas.openxmlformats.org/officeDocument/2006/relationships">
+  <p:cSld>
+    <p:bg>
+      <p:bgPr>
+        <a:solidFill>
+          <a:srgbClr val="F4F7F9"/>
+        </a:solidFill>
+        <a:effectLst/>
+      </p:bgPr>
+    </p:bg>
+    <p:spTree>
+      <p:nvGrpSpPr>
+        <p:cNvPr id="1" name=""/>
+        <p:cNvGrpSpPr/>
+        <p:nvPr/>
+      </p:nvGrpSpPr>
+      <p:grpSpPr/>
+      <p:sp>
+        <p:nvSpPr>
+          <p:cNvPr id="2" name="TextBox 1"/>
+          <p:cNvSpPr txBox="1"/>
+          <p:nvPr/>
+        </p:nvSpPr>
+        <p:spPr>
+          <a:xfrm>
+            <a:off x="548640" y="411480"/>
+            <a:ext cx="10515600" cy="320040"/>
+          </a:xfrm>
+          <a:prstGeom prst="rect">
+            <a:avLst/>
+          </a:prstGeom>
+          <a:noFill/>
+        </p:spPr>
+        <p:txBody>
+          <a:bodyPr wrap="square">
+            <a:spAutoFit/>
+          </a:bodyPr>
+          <a:lstStyle/>
+          <a:p>
+            <a:pPr algn="l"/>
+            <a:r>
+              <a:rPr sz="1300" b="1" i="0">
+                <a:solidFill>
+                  <a:srgbClr val="F2A541"/>
+                </a:solidFill>
+                <a:latin typeface="Calibri"/>
+              </a:rPr>
+              <a:t>TRES CASOS D'ÚS</a:t>
+            </a:r>
+          </a:p>
+        </p:txBody>
+      </p:sp>
+      <p:sp>
+        <p:nvSpPr>
+          <p:cNvPr id="3" name="TextBox 2"/>
+          <p:cNvSpPr txBox="1"/>
+          <p:nvPr/>
+        </p:nvSpPr>
+        <p:spPr>
+          <a:xfrm>
+            <a:off x="548640" y="685800"/>
+            <a:ext cx="10972800" cy="822960"/>
+          </a:xfrm>
+          <a:prstGeom prst="rect">
+            <a:avLst/>
+          </a:prstGeom>
+          <a:noFill/>
+        </p:spPr>
+        <p:txBody>
+          <a:bodyPr wrap="square">
+            <a:spAutoFit/>
+          </a:bodyPr>
+          <a:lstStyle/>
+          <a:p>
+            <a:pPr algn="l"/>
+            <a:r>
+              <a:rPr sz="2800" b="1" i="0">
+                <a:solidFill>
+                  <a:srgbClr val="16242E"/>
+                </a:solidFill>
+                <a:latin typeface="Cambria"/>
+              </a:rPr>
+              <a:t>Clonació, imatge de disc o imatge forense?</a:t>
+            </a:r>
+          </a:p>
+        </p:txBody>
+      </p:sp>
+      <p:pic>
+        <p:nvPicPr>
+          <p:cNvPr id="4" name="Picture 3" descr="clonadora_forense.png"/>
+          <p:cNvPicPr>
+            <a:picLocks noChangeAspect="1"/>
+          </p:cNvPicPr>
+          <p:nvPr/>
+        </p:nvPicPr>
+        <p:blipFill>
+          <a:blip r:embed="rId2"/>
+          <a:stretch>
+            <a:fillRect/>
+          </a:stretch>
+        </p:blipFill>
+        <p:spPr>
+          <a:xfrm>
+            <a:off x="3352647" y="1920240"/>
+            <a:ext cx="5486400" cy="3764280"/>
+          </a:xfrm>
+          <a:prstGeom prst="rect">
+            <a:avLst/>
+          </a:prstGeom>
+        </p:spPr>
+      </p:pic>
+      <p:sp>
+        <p:nvSpPr>
+          <p:cNvPr id="5" name="TextBox 4"/>
+          <p:cNvSpPr txBox="1"/>
+          <p:nvPr/>
+        </p:nvSpPr>
+        <p:spPr>
+          <a:xfrm>
+            <a:off x="548640" y="5821680"/>
+            <a:ext cx="11064240" cy="457200"/>
+          </a:xfrm>
+          <a:prstGeom prst="rect">
+            <a:avLst/>
+          </a:prstGeom>
+          <a:noFill/>
+        </p:spPr>
+        <p:txBody>
+          <a:bodyPr wrap="square">
+            <a:spAutoFit/>
+          </a:bodyPr>
+          <a:lstStyle/>
+          <a:p>
+            <a:pPr algn="ctr"/>
+            <a:r>
+              <a:rPr sz="1200" b="0" i="1">
+                <a:solidFill>
+                  <a:srgbClr val="5B6B77"/>
+                </a:solidFill>
+                <a:latin typeface="Calibri"/>
+              </a:rPr>
+              <a:t>Una clonadora forense fa una còpia bloc a bloc d'un disc, preservant-ne la integritat per a investigacions.</a:t>
+            </a:r>
+          </a:p>
+        </p:txBody>
+      </p:sp>
+      <p:sp>
+        <p:nvSpPr>
+          <p:cNvPr id="6" name="TextBox 5"/>
+          <p:cNvSpPr txBox="1"/>
+          <p:nvPr/>
+        </p:nvSpPr>
+        <p:spPr>
+          <a:xfrm>
+            <a:off x="11548872" y="6446520"/>
+            <a:ext cx="365760" cy="274320"/>
+          </a:xfrm>
+          <a:prstGeom prst="rect">
+            <a:avLst/>
+          </a:prstGeom>
+          <a:noFill/>
+        </p:spPr>
+        <p:txBody>
+          <a:bodyPr wrap="none">
+            <a:spAutoFit/>
+          </a:bodyPr>
+          <a:lstStyle/>
+          <a:p>
+            <a:pPr algn="r"/>
+            <a:r>
+              <a:rPr sz="1000">
+                <a:solidFill>
+                  <a:srgbClr val="5B6B77"/>
+                </a:solidFill>
+              </a:rPr>
+              <a:t>24</a:t>
+            </a:r>
           </a:p>
         </p:txBody>
       </p:sp>
@@ -11504,7 +12621,7 @@
                 <a:ea typeface="Calibri" pitchFamily="34" charset="-122"/>
                 <a:cs typeface="Calibri" pitchFamily="34" charset="-120"/>
               </a:rPr>
-              <a:t>2</a:t>
+              <a:t>3</a:t>
             </a:r>
             <a:endParaRPr lang="en-US" sz="1100" dirty="0"/>
           </a:p>
@@ -11543,6 +12660,10 @@
             </a:outerShdw>
           </a:effectLst>
         </p:spPr>
+        <p:txBody>
+          <a:bodyPr/>
+          <a:p/>
+        </p:txBody>
       </p:sp>
       <p:sp>
         <p:nvSpPr>
@@ -11563,6 +12684,10 @@
           </a:solidFill>
           <a:ln/>
         </p:spPr>
+        <p:txBody>
+          <a:bodyPr/>
+          <a:p/>
+        </p:txBody>
       </p:sp>
       <p:pic>
         <p:nvPicPr>
@@ -11702,6 +12827,10 @@
             </a:outerShdw>
           </a:effectLst>
         </p:spPr>
+        <p:txBody>
+          <a:bodyPr/>
+          <a:p/>
+        </p:txBody>
       </p:sp>
       <p:sp>
         <p:nvSpPr>
@@ -11722,6 +12851,10 @@
           </a:solidFill>
           <a:ln/>
         </p:spPr>
+        <p:txBody>
+          <a:bodyPr/>
+          <a:p/>
+        </p:txBody>
       </p:sp>
       <p:pic>
         <p:nvPicPr>
@@ -11861,6 +12994,10 @@
             </a:outerShdw>
           </a:effectLst>
         </p:spPr>
+        <p:txBody>
+          <a:bodyPr/>
+          <a:p/>
+        </p:txBody>
       </p:sp>
       <p:sp>
         <p:nvSpPr>
@@ -11881,6 +13018,10 @@
           </a:solidFill>
           <a:ln/>
         </p:spPr>
+        <p:txBody>
+          <a:bodyPr/>
+          <a:p/>
+        </p:txBody>
       </p:sp>
       <p:pic>
         <p:nvPicPr>
@@ -12316,7 +13457,7 @@
                 <a:ea typeface="Calibri" pitchFamily="34" charset="-122"/>
                 <a:cs typeface="Calibri" pitchFamily="34" charset="-120"/>
               </a:rPr>
-              <a:t>3</a:t>
+              <a:t>4</a:t>
             </a:r>
             <a:endParaRPr lang="en-US" sz="1100" dirty="0"/>
           </a:p>
@@ -12465,7 +13606,7 @@
                 <a:ea typeface="Calibri" pitchFamily="34" charset="-122"/>
                 <a:cs typeface="Calibri" pitchFamily="34" charset="-120"/>
               </a:rPr>
-              <a:t>4</a:t>
+              <a:t>5</a:t>
             </a:r>
             <a:endParaRPr lang="en-US" sz="1100" dirty="0"/>
           </a:p>
@@ -12780,7 +13921,7 @@
                 <a:ea typeface="Calibri" pitchFamily="34" charset="-122"/>
                 <a:cs typeface="Calibri" pitchFamily="34" charset="-120"/>
               </a:rPr>
-              <a:t>5</a:t>
+              <a:t>6</a:t>
             </a:r>
             <a:endParaRPr lang="en-US" sz="1100" dirty="0"/>
           </a:p>
@@ -12999,7 +14140,7 @@
                 <a:ea typeface="Calibri" pitchFamily="34" charset="-122"/>
                 <a:cs typeface="Calibri" pitchFamily="34" charset="-120"/>
               </a:rPr>
-              <a:t>6</a:t>
+              <a:t>7</a:t>
             </a:r>
             <a:endParaRPr lang="en-US" sz="1100" dirty="0"/>
           </a:p>
@@ -13038,6 +14179,10 @@
             </a:outerShdw>
           </a:effectLst>
         </p:spPr>
+        <p:txBody>
+          <a:bodyPr/>
+          <a:p/>
+        </p:txBody>
       </p:sp>
       <p:sp>
         <p:nvSpPr>
@@ -13058,6 +14203,10 @@
           </a:solidFill>
           <a:ln/>
         </p:spPr>
+        <p:txBody>
+          <a:bodyPr/>
+          <a:p/>
+        </p:txBody>
       </p:sp>
       <p:pic>
         <p:nvPicPr>
@@ -13197,6 +14346,10 @@
             </a:outerShdw>
           </a:effectLst>
         </p:spPr>
+        <p:txBody>
+          <a:bodyPr/>
+          <a:p/>
+        </p:txBody>
       </p:sp>
       <p:sp>
         <p:nvSpPr>
@@ -13217,6 +14370,10 @@
           </a:solidFill>
           <a:ln/>
         </p:spPr>
+        <p:txBody>
+          <a:bodyPr/>
+          <a:p/>
+        </p:txBody>
       </p:sp>
       <p:pic>
         <p:nvPicPr>
@@ -13356,6 +14513,10 @@
             </a:outerShdw>
           </a:effectLst>
         </p:spPr>
+        <p:txBody>
+          <a:bodyPr/>
+          <a:p/>
+        </p:txBody>
       </p:sp>
       <p:sp>
         <p:nvSpPr>
@@ -13376,6 +14537,10 @@
           </a:solidFill>
           <a:ln/>
         </p:spPr>
+        <p:txBody>
+          <a:bodyPr/>
+          <a:p/>
+        </p:txBody>
       </p:sp>
       <p:pic>
         <p:nvPicPr>
@@ -13503,6 +14668,10 @@
           </a:solidFill>
           <a:ln/>
         </p:spPr>
+        <p:txBody>
+          <a:bodyPr/>
+          <a:p/>
+        </p:txBody>
       </p:sp>
       <p:pic>
         <p:nvPicPr>
@@ -13713,7 +14882,7 @@
                 <a:ea typeface="Calibri" pitchFamily="34" charset="-122"/>
                 <a:cs typeface="Calibri" pitchFamily="34" charset="-120"/>
               </a:rPr>
-              <a:t>7</a:t>
+              <a:t>8</a:t>
             </a:r>
             <a:endParaRPr lang="en-US" sz="1100" dirty="0"/>
           </a:p>
@@ -13974,6 +15143,10 @@
           </a:solidFill>
           <a:ln/>
         </p:spPr>
+        <p:txBody>
+          <a:bodyPr/>
+          <a:p/>
+        </p:txBody>
       </p:sp>
       <p:pic>
         <p:nvPicPr>
@@ -14184,7 +15357,7 @@
                 <a:ea typeface="Calibri" pitchFamily="34" charset="-122"/>
                 <a:cs typeface="Calibri" pitchFamily="34" charset="-120"/>
               </a:rPr>
-              <a:t>8</a:t>
+              <a:t>10</a:t>
             </a:r>
             <a:endParaRPr lang="en-US" sz="1100" dirty="0"/>
           </a:p>

--- a/RA2 - Emmagatzematge i copies de seguretat/AA3 - Copies de seguretat/RA2_AA3_Copies_de_seguretat.pptx
+++ b/RA2 - Emmagatzematge i copies de seguretat/AA3 - Copies de seguretat/RA2_AA3_Copies_de_seguretat.pptx
@@ -14226,7 +14226,7 @@
                 <a:ea typeface="Calibri" pitchFamily="34" charset="-122"/>
                 <a:cs typeface="Calibri" pitchFamily="34" charset="-120"/>
               </a:rPr>
-              <a:t>Llicència Creative Commons BY-NC-SA · Institut Obert de Catalunya, 2011 (materials adaptats i ampliats)</a:t>
+              <a:t>Llicència CC BY-SA 4.0 · Adaptat de "Materials" (SMX-0226SI), Carlos Alonso Martínez, Escola Pia de Mataró</a:t>
             </a:r>
             <a:endParaRPr lang="en-US" sz="1050" dirty="0"/>
           </a:p>
